--- a/output/bloodtest_report.pptx
+++ b/output/bloodtest_report.pptx
@@ -11,6 +11,7 @@
     <p:sldId id="259" r:id="rId10"/>
     <p:sldId id="260" r:id="rId11"/>
     <p:sldId id="261" r:id="rId12"/>
+    <p:sldId id="262" r:id="rId13"/>
   </p:sldIdLst>
   <p:sldSz cx="9144000" cy="6858000" type="screen4x3"/>
   <p:notesSz cx="6858000" cy="9144000"/>
@@ -3303,7 +3304,7 @@
                   <a:srgbClr val="FFFFFF"/>
                 </a:solidFill>
               </a:rPr>
-              <a:t>Blood Test Report</a:t>
+              <a:t>Doctor's Report</a:t>
             </a:r>
           </a:p>
           <a:p>
@@ -3350,7 +3351,7 @@
               </a:defRPr>
             </a:pPr>
             <a:r>
-              <a:t>8 markers extracted</a:t>
+              <a:t>Test date: 01.02.22</a:t>
             </a:r>
           </a:p>
           <a:p>
@@ -3362,7 +3363,19 @@
               </a:defRPr>
             </a:pPr>
             <a:r>
-              <a:t>2 notable values</a:t>
+              <a:t>5 markers extracted</a:t>
+            </a:r>
+          </a:p>
+          <a:p>
+            <a:pPr>
+              <a:defRPr sz="1400">
+                <a:solidFill>
+                  <a:srgbClr val="FFFFFF"/>
+                </a:solidFill>
+              </a:defRPr>
+            </a:pPr>
+            <a:r>
+              <a:t>1 notable values</a:t>
             </a:r>
           </a:p>
           <a:p>
@@ -3409,7 +3422,7 @@
               </a:defRPr>
             </a:pPr>
             <a:r>
-              <a:t>8 extracted markers</a:t>
+              <a:t>5 extracted markers</a:t>
             </a:r>
           </a:p>
           <a:p>
@@ -3421,7 +3434,7 @@
               </a:defRPr>
             </a:pPr>
             <a:r>
-              <a:t>2 notable values</a:t>
+              <a:t>1 notable values</a:t>
             </a:r>
           </a:p>
         </p:txBody>
@@ -3665,7 +3678,7 @@
                   <a:srgbClr val="0B3D59"/>
                 </a:solidFill>
               </a:rPr>
-              <a:t>8</a:t>
+              <a:t>5</a:t>
             </a:r>
           </a:p>
         </p:txBody>
@@ -3729,7 +3742,7 @@
                   <a:srgbClr val="0B3D59"/>
                 </a:solidFill>
               </a:rPr>
-              <a:t>6</a:t>
+              <a:t>4</a:t>
             </a:r>
           </a:p>
         </p:txBody>
@@ -3793,7 +3806,7 @@
                   <a:srgbClr val="0B3D59"/>
                 </a:solidFill>
               </a:rPr>
-              <a:t>2</a:t>
+              <a:t>1</a:t>
             </a:r>
           </a:p>
         </p:txBody>
@@ -3938,7 +3951,7 @@
                   <a:srgbClr val="0B3D59"/>
                 </a:solidFill>
               </a:rPr>
-              <a:t>Important Blood Values</a:t>
+              <a:t>Normal Values</a:t>
             </a:r>
           </a:p>
         </p:txBody>
@@ -3973,7 +3986,969 @@
               </a:defRPr>
             </a:pPr>
             <a:r>
-              <a:t>Top extracted values from the OCR output</a:t>
+              <a:t>Values inside the reference range</a:t>
+            </a:r>
+          </a:p>
+        </p:txBody>
+      </p:sp>
+      <p:graphicFrame>
+        <p:nvGraphicFramePr>
+          <p:cNvPr id="6" name="Table 5"/>
+          <p:cNvGraphicFramePr>
+            <a:graphicFrameLocks noGrp="1"/>
+          </p:cNvGraphicFramePr>
+          <p:nvPr/>
+        </p:nvGraphicFramePr>
+        <p:xfrm>
+          <a:off x="365760" y="1417320"/>
+          <a:ext cx="8412480" cy="4206240"/>
+        </p:xfrm>
+        <a:graphic>
+          <a:graphicData uri="http://schemas.openxmlformats.org/drawingml/2006/table">
+            <a:tbl>
+              <a:tblPr firstRow="1" bandRow="1">
+                <a:tableStyleId>{5C22544A-7EE6-4342-B048-85BDC9FD1C3A}</a:tableStyleId>
+              </a:tblPr>
+              <a:tblGrid>
+                <a:gridCol w="2926080"/>
+                <a:gridCol w="1188720"/>
+                <a:gridCol w="1097280"/>
+                <a:gridCol w="3200400"/>
+              </a:tblGrid>
+              <a:tr h="841248">
+                <a:tc>
+                  <a:txBody>
+                    <a:bodyPr/>
+                    <a:lstStyle/>
+                    <a:p>
+                      <a:pPr>
+                        <a:defRPr b="1" sz="1200">
+                          <a:solidFill>
+                            <a:srgbClr val="0B3D59"/>
+                          </a:solidFill>
+                        </a:defRPr>
+                      </a:pPr>
+                      <a:r>
+                        <a:t>Marker</a:t>
+                      </a:r>
+                    </a:p>
+                  </a:txBody>
+                  <a:tcPr/>
+                </a:tc>
+                <a:tc>
+                  <a:txBody>
+                    <a:bodyPr/>
+                    <a:lstStyle/>
+                    <a:p>
+                      <a:pPr>
+                        <a:defRPr b="1" sz="1200">
+                          <a:solidFill>
+                            <a:srgbClr val="0B3D59"/>
+                          </a:solidFill>
+                        </a:defRPr>
+                      </a:pPr>
+                      <a:r>
+                        <a:t>Value</a:t>
+                      </a:r>
+                    </a:p>
+                  </a:txBody>
+                  <a:tcPr/>
+                </a:tc>
+                <a:tc>
+                  <a:txBody>
+                    <a:bodyPr/>
+                    <a:lstStyle/>
+                    <a:p>
+                      <a:pPr>
+                        <a:defRPr b="1" sz="1200">
+                          <a:solidFill>
+                            <a:srgbClr val="0B3D59"/>
+                          </a:solidFill>
+                        </a:defRPr>
+                      </a:pPr>
+                      <a:r>
+                        <a:t>Unit</a:t>
+                      </a:r>
+                    </a:p>
+                  </a:txBody>
+                  <a:tcPr/>
+                </a:tc>
+                <a:tc>
+                  <a:txBody>
+                    <a:bodyPr/>
+                    <a:lstStyle/>
+                    <a:p>
+                      <a:pPr>
+                        <a:defRPr b="1" sz="1200">
+                          <a:solidFill>
+                            <a:srgbClr val="0B3D59"/>
+                          </a:solidFill>
+                        </a:defRPr>
+                      </a:pPr>
+                      <a:r>
+                        <a:t>Reference</a:t>
+                      </a:r>
+                    </a:p>
+                  </a:txBody>
+                  <a:tcPr/>
+                </a:tc>
+              </a:tr>
+              <a:tr h="841248">
+                <a:tc>
+                  <a:txBody>
+                    <a:bodyPr/>
+                    <a:lstStyle/>
+                    <a:p>
+                      <a:pPr>
+                        <a:defRPr sz="1000"/>
+                      </a:pPr>
+                      <a:r>
+                        <a:t>Calcium</a:t>
+                      </a:r>
+                    </a:p>
+                  </a:txBody>
+                  <a:tcPr>
+                    <a:solidFill>
+                      <a:srgbClr val="FFFFFF"/>
+                    </a:solidFill>
+                  </a:tcPr>
+                </a:tc>
+                <a:tc>
+                  <a:txBody>
+                    <a:bodyPr/>
+                    <a:lstStyle/>
+                    <a:p>
+                      <a:pPr>
+                        <a:defRPr sz="1000"/>
+                      </a:pPr>
+                      <a:r>
+                        <a:t>27.36</a:t>
+                      </a:r>
+                    </a:p>
+                  </a:txBody>
+                  <a:tcPr>
+                    <a:solidFill>
+                      <a:srgbClr val="FFFFFF"/>
+                    </a:solidFill>
+                  </a:tcPr>
+                </a:tc>
+                <a:tc>
+                  <a:txBody>
+                    <a:bodyPr/>
+                    <a:lstStyle/>
+                    <a:p>
+                      <a:pPr>
+                        <a:defRPr sz="1000"/>
+                      </a:pPr>
+                      <a:r>
+                        <a:t>mmol/l</a:t>
+                      </a:r>
+                    </a:p>
+                  </a:txBody>
+                  <a:tcPr>
+                    <a:solidFill>
+                      <a:srgbClr val="FFFFFF"/>
+                    </a:solidFill>
+                  </a:tcPr>
+                </a:tc>
+                <a:tc>
+                  <a:txBody>
+                    <a:bodyPr/>
+                    <a:lstStyle/>
+                    <a:p>
+                      <a:pPr>
+                        <a:defRPr sz="1000"/>
+                      </a:pPr>
+                      <a:r>
+                        <a:t>2.05- 212.55</a:t>
+                      </a:r>
+                    </a:p>
+                  </a:txBody>
+                  <a:tcPr>
+                    <a:solidFill>
+                      <a:srgbClr val="FFFFFF"/>
+                    </a:solidFill>
+                  </a:tcPr>
+                </a:tc>
+              </a:tr>
+              <a:tr h="841248">
+                <a:tc>
+                  <a:txBody>
+                    <a:bodyPr/>
+                    <a:lstStyle/>
+                    <a:p>
+                      <a:pPr>
+                        <a:defRPr sz="1000"/>
+                      </a:pPr>
+                      <a:r>
+                        <a:t>HDL- Cholesterin</a:t>
+                      </a:r>
+                    </a:p>
+                  </a:txBody>
+                  <a:tcPr>
+                    <a:solidFill>
+                      <a:srgbClr val="FFFFFF"/>
+                    </a:solidFill>
+                  </a:tcPr>
+                </a:tc>
+                <a:tc>
+                  <a:txBody>
+                    <a:bodyPr/>
+                    <a:lstStyle/>
+                    <a:p>
+                      <a:pPr>
+                        <a:defRPr sz="1000"/>
+                      </a:pPr>
+                      <a:r>
+                        <a:t>48.0</a:t>
+                      </a:r>
+                    </a:p>
+                  </a:txBody>
+                  <a:tcPr>
+                    <a:solidFill>
+                      <a:srgbClr val="FFFFFF"/>
+                    </a:solidFill>
+                  </a:tcPr>
+                </a:tc>
+                <a:tc>
+                  <a:txBody>
+                    <a:bodyPr/>
+                    <a:lstStyle/>
+                    <a:p>
+                      <a:pPr>
+                        <a:defRPr sz="1000"/>
+                      </a:pPr>
+                      <a:r>
+                        <a:t>mg/dl</a:t>
+                      </a:r>
+                    </a:p>
+                  </a:txBody>
+                  <a:tcPr>
+                    <a:solidFill>
+                      <a:srgbClr val="FFFFFF"/>
+                    </a:solidFill>
+                  </a:tcPr>
+                </a:tc>
+                <a:tc>
+                  <a:txBody>
+                    <a:bodyPr/>
+                    <a:lstStyle/>
+                    <a:p>
+                      <a:pPr>
+                        <a:defRPr sz="1000"/>
+                      </a:pPr>
+                      <a:r>
+                        <a:t>&gt; 40</a:t>
+                      </a:r>
+                    </a:p>
+                  </a:txBody>
+                  <a:tcPr>
+                    <a:solidFill>
+                      <a:srgbClr val="FFFFFF"/>
+                    </a:solidFill>
+                  </a:tcPr>
+                </a:tc>
+              </a:tr>
+              <a:tr h="841248">
+                <a:tc>
+                  <a:txBody>
+                    <a:bodyPr/>
+                    <a:lstStyle/>
+                    <a:p>
+                      <a:pPr>
+                        <a:defRPr sz="1000"/>
+                      </a:pPr>
+                      <a:r>
+                        <a:t>Kreatinin</a:t>
+                      </a:r>
+                    </a:p>
+                  </a:txBody>
+                  <a:tcPr>
+                    <a:solidFill>
+                      <a:srgbClr val="FFFFFF"/>
+                    </a:solidFill>
+                  </a:tcPr>
+                </a:tc>
+                <a:tc>
+                  <a:txBody>
+                    <a:bodyPr/>
+                    <a:lstStyle/>
+                    <a:p>
+                      <a:pPr>
+                        <a:defRPr sz="1000"/>
+                      </a:pPr>
+                      <a:r>
+                        <a:t>0.95</a:t>
+                      </a:r>
+                    </a:p>
+                  </a:txBody>
+                  <a:tcPr>
+                    <a:solidFill>
+                      <a:srgbClr val="FFFFFF"/>
+                    </a:solidFill>
+                  </a:tcPr>
+                </a:tc>
+                <a:tc>
+                  <a:txBody>
+                    <a:bodyPr/>
+                    <a:lstStyle/>
+                    <a:p>
+                      <a:pPr>
+                        <a:defRPr sz="1000"/>
+                      </a:pPr>
+                      <a:r>
+                        <a:t>mg/dl</a:t>
+                      </a:r>
+                    </a:p>
+                  </a:txBody>
+                  <a:tcPr>
+                    <a:solidFill>
+                      <a:srgbClr val="FFFFFF"/>
+                    </a:solidFill>
+                  </a:tcPr>
+                </a:tc>
+                <a:tc>
+                  <a:txBody>
+                    <a:bodyPr/>
+                    <a:lstStyle/>
+                    <a:p>
+                      <a:pPr>
+                        <a:defRPr sz="1000"/>
+                      </a:pPr>
+                      <a:r>
+                        <a:t>&lt; 1.2</a:t>
+                      </a:r>
+                    </a:p>
+                  </a:txBody>
+                  <a:tcPr>
+                    <a:solidFill>
+                      <a:srgbClr val="FFFFFF"/>
+                    </a:solidFill>
+                  </a:tcPr>
+                </a:tc>
+              </a:tr>
+              <a:tr h="841248">
+                <a:tc>
+                  <a:txBody>
+                    <a:bodyPr/>
+                    <a:lstStyle/>
+                    <a:p>
+                      <a:pPr>
+                        <a:defRPr sz="1000"/>
+                      </a:pPr>
+                      <a:r>
+                        <a:t>Triglyceride</a:t>
+                      </a:r>
+                    </a:p>
+                  </a:txBody>
+                  <a:tcPr>
+                    <a:solidFill>
+                      <a:srgbClr val="FFFFFF"/>
+                    </a:solidFill>
+                  </a:tcPr>
+                </a:tc>
+                <a:tc>
+                  <a:txBody>
+                    <a:bodyPr/>
+                    <a:lstStyle/>
+                    <a:p>
+                      <a:pPr>
+                        <a:defRPr sz="1000"/>
+                      </a:pPr>
+                      <a:r>
+                        <a:t>128.0</a:t>
+                      </a:r>
+                    </a:p>
+                  </a:txBody>
+                  <a:tcPr>
+                    <a:solidFill>
+                      <a:srgbClr val="FFFFFF"/>
+                    </a:solidFill>
+                  </a:tcPr>
+                </a:tc>
+                <a:tc>
+                  <a:txBody>
+                    <a:bodyPr/>
+                    <a:lstStyle/>
+                    <a:p>
+                      <a:pPr>
+                        <a:defRPr sz="1000"/>
+                      </a:pPr>
+                      <a:r>
+                        <a:t>mg/dl</a:t>
+                      </a:r>
+                    </a:p>
+                  </a:txBody>
+                  <a:tcPr>
+                    <a:solidFill>
+                      <a:srgbClr val="FFFFFF"/>
+                    </a:solidFill>
+                  </a:tcPr>
+                </a:tc>
+                <a:tc>
+                  <a:txBody>
+                    <a:bodyPr/>
+                    <a:lstStyle/>
+                    <a:p>
+                      <a:pPr>
+                        <a:defRPr sz="1000"/>
+                      </a:pPr>
+                      <a:r>
+                        <a:t>&lt; 150</a:t>
+                      </a:r>
+                    </a:p>
+                  </a:txBody>
+                  <a:tcPr>
+                    <a:solidFill>
+                      <a:srgbClr val="FFFFFF"/>
+                    </a:solidFill>
+                  </a:tcPr>
+                </a:tc>
+              </a:tr>
+            </a:tbl>
+          </a:graphicData>
+        </a:graphic>
+      </p:graphicFrame>
+    </p:spTree>
+  </p:cSld>
+  <p:clrMapOvr>
+    <a:masterClrMapping/>
+  </p:clrMapOvr>
+</p:sld>
+</file>
+
+<file path=ppt/slides/slide4.xml><?xml version="1.0" encoding="utf-8"?>
+<p:sld xmlns:a="http://schemas.openxmlformats.org/drawingml/2006/main" xmlns:p="http://schemas.openxmlformats.org/presentationml/2006/main" xmlns:r="http://schemas.openxmlformats.org/officeDocument/2006/relationships">
+  <p:cSld>
+    <p:bg>
+      <p:bgPr>
+        <a:solidFill>
+          <a:srgbClr val="F7F9FB"/>
+        </a:solidFill>
+        <a:effectLst/>
+      </p:bgPr>
+    </p:bg>
+    <p:spTree>
+      <p:nvGrpSpPr>
+        <p:cNvPr id="1" name=""/>
+        <p:cNvGrpSpPr/>
+        <p:nvPr/>
+      </p:nvGrpSpPr>
+      <p:grpSpPr/>
+      <p:sp>
+        <p:nvSpPr>
+          <p:cNvPr id="2" name="Rectangle 1"/>
+          <p:cNvSpPr/>
+          <p:nvPr/>
+        </p:nvSpPr>
+        <p:spPr>
+          <a:xfrm>
+            <a:off x="0" y="0"/>
+            <a:ext cx="9144000" cy="347472"/>
+          </a:xfrm>
+          <a:prstGeom prst="rect">
+            <a:avLst/>
+          </a:prstGeom>
+          <a:solidFill>
+            <a:srgbClr val="0B3D59"/>
+          </a:solidFill>
+          <a:ln>
+            <a:noFill/>
+          </a:ln>
+        </p:spPr>
+        <p:style>
+          <a:lnRef idx="1">
+            <a:schemeClr val="accent1"/>
+          </a:lnRef>
+          <a:fillRef idx="3">
+            <a:schemeClr val="accent1"/>
+          </a:fillRef>
+          <a:effectRef idx="2">
+            <a:schemeClr val="accent1"/>
+          </a:effectRef>
+          <a:fontRef idx="minor">
+            <a:schemeClr val="lt1"/>
+          </a:fontRef>
+        </p:style>
+        <p:txBody>
+          <a:bodyPr rtlCol="0" anchor="ctr"/>
+          <a:lstStyle/>
+          <a:p>
+            <a:pPr algn="ctr"/>
+          </a:p>
+        </p:txBody>
+      </p:sp>
+      <p:sp>
+        <p:nvSpPr>
+          <p:cNvPr id="3" name="Rectangle 2"/>
+          <p:cNvSpPr/>
+          <p:nvPr/>
+        </p:nvSpPr>
+        <p:spPr>
+          <a:xfrm>
+            <a:off x="0" y="347472"/>
+            <a:ext cx="9144000" cy="64008"/>
+          </a:xfrm>
+          <a:prstGeom prst="rect">
+            <a:avLst/>
+          </a:prstGeom>
+          <a:solidFill>
+            <a:srgbClr val="158C92"/>
+          </a:solidFill>
+          <a:ln>
+            <a:noFill/>
+          </a:ln>
+        </p:spPr>
+        <p:style>
+          <a:lnRef idx="1">
+            <a:schemeClr val="accent1"/>
+          </a:lnRef>
+          <a:fillRef idx="3">
+            <a:schemeClr val="accent1"/>
+          </a:fillRef>
+          <a:effectRef idx="2">
+            <a:schemeClr val="accent1"/>
+          </a:effectRef>
+          <a:fontRef idx="minor">
+            <a:schemeClr val="lt1"/>
+          </a:fontRef>
+        </p:style>
+        <p:txBody>
+          <a:bodyPr rtlCol="0" anchor="ctr"/>
+          <a:lstStyle/>
+          <a:p>
+            <a:pPr algn="ctr"/>
+          </a:p>
+        </p:txBody>
+      </p:sp>
+      <p:sp>
+        <p:nvSpPr>
+          <p:cNvPr id="4" name="TextBox 3"/>
+          <p:cNvSpPr txBox="1"/>
+          <p:nvPr/>
+        </p:nvSpPr>
+        <p:spPr>
+          <a:xfrm>
+            <a:off x="502920" y="502920"/>
+            <a:ext cx="8046720" cy="640080"/>
+          </a:xfrm>
+          <a:prstGeom prst="rect">
+            <a:avLst/>
+          </a:prstGeom>
+          <a:noFill/>
+        </p:spPr>
+        <p:txBody>
+          <a:bodyPr wrap="none">
+            <a:spAutoFit/>
+          </a:bodyPr>
+          <a:lstStyle/>
+          <a:p>
+            <a:r>
+              <a:rPr sz="2600" b="1">
+                <a:solidFill>
+                  <a:srgbClr val="0B3D59"/>
+                </a:solidFill>
+              </a:rPr>
+              <a:t>Abnormal Values</a:t>
+            </a:r>
+          </a:p>
+        </p:txBody>
+      </p:sp>
+      <p:sp>
+        <p:nvSpPr>
+          <p:cNvPr id="5" name="TextBox 4"/>
+          <p:cNvSpPr txBox="1"/>
+          <p:nvPr/>
+        </p:nvSpPr>
+        <p:spPr>
+          <a:xfrm>
+            <a:off x="512064" y="960120"/>
+            <a:ext cx="8229600" cy="320040"/>
+          </a:xfrm>
+          <a:prstGeom prst="rect">
+            <a:avLst/>
+          </a:prstGeom>
+          <a:noFill/>
+        </p:spPr>
+        <p:txBody>
+          <a:bodyPr wrap="none">
+            <a:spAutoFit/>
+          </a:bodyPr>
+          <a:lstStyle/>
+          <a:p>
+            <a:pPr>
+              <a:defRPr sz="1100">
+                <a:solidFill>
+                  <a:srgbClr val="495464"/>
+                </a:solidFill>
+              </a:defRPr>
+            </a:pPr>
+            <a:r>
+              <a:t>Values outside or close to the reference range</a:t>
+            </a:r>
+          </a:p>
+        </p:txBody>
+      </p:sp>
+      <p:graphicFrame>
+        <p:nvGraphicFramePr>
+          <p:cNvPr id="6" name="Table 5"/>
+          <p:cNvGraphicFramePr>
+            <a:graphicFrameLocks noGrp="1"/>
+          </p:cNvGraphicFramePr>
+          <p:nvPr/>
+        </p:nvGraphicFramePr>
+        <p:xfrm>
+          <a:off x="365760" y="1417320"/>
+          <a:ext cx="8412480" cy="4206240"/>
+        </p:xfrm>
+        <a:graphic>
+          <a:graphicData uri="http://schemas.openxmlformats.org/drawingml/2006/table">
+            <a:tbl>
+              <a:tblPr firstRow="1" bandRow="1">
+                <a:tableStyleId>{5C22544A-7EE6-4342-B048-85BDC9FD1C3A}</a:tableStyleId>
+              </a:tblPr>
+              <a:tblGrid>
+                <a:gridCol w="2926080"/>
+                <a:gridCol w="1188720"/>
+                <a:gridCol w="1097280"/>
+                <a:gridCol w="3200400"/>
+              </a:tblGrid>
+              <a:tr h="2103120">
+                <a:tc>
+                  <a:txBody>
+                    <a:bodyPr/>
+                    <a:lstStyle/>
+                    <a:p>
+                      <a:pPr>
+                        <a:defRPr b="1" sz="1200">
+                          <a:solidFill>
+                            <a:srgbClr val="0B3D59"/>
+                          </a:solidFill>
+                        </a:defRPr>
+                      </a:pPr>
+                      <a:r>
+                        <a:t>Marker</a:t>
+                      </a:r>
+                    </a:p>
+                  </a:txBody>
+                  <a:tcPr/>
+                </a:tc>
+                <a:tc>
+                  <a:txBody>
+                    <a:bodyPr/>
+                    <a:lstStyle/>
+                    <a:p>
+                      <a:pPr>
+                        <a:defRPr b="1" sz="1200">
+                          <a:solidFill>
+                            <a:srgbClr val="0B3D59"/>
+                          </a:solidFill>
+                        </a:defRPr>
+                      </a:pPr>
+                      <a:r>
+                        <a:t>Value</a:t>
+                      </a:r>
+                    </a:p>
+                  </a:txBody>
+                  <a:tcPr/>
+                </a:tc>
+                <a:tc>
+                  <a:txBody>
+                    <a:bodyPr/>
+                    <a:lstStyle/>
+                    <a:p>
+                      <a:pPr>
+                        <a:defRPr b="1" sz="1200">
+                          <a:solidFill>
+                            <a:srgbClr val="0B3D59"/>
+                          </a:solidFill>
+                        </a:defRPr>
+                      </a:pPr>
+                      <a:r>
+                        <a:t>Unit</a:t>
+                      </a:r>
+                    </a:p>
+                  </a:txBody>
+                  <a:tcPr/>
+                </a:tc>
+                <a:tc>
+                  <a:txBody>
+                    <a:bodyPr/>
+                    <a:lstStyle/>
+                    <a:p>
+                      <a:pPr>
+                        <a:defRPr b="1" sz="1200">
+                          <a:solidFill>
+                            <a:srgbClr val="0B3D59"/>
+                          </a:solidFill>
+                        </a:defRPr>
+                      </a:pPr>
+                      <a:r>
+                        <a:t>Reference</a:t>
+                      </a:r>
+                    </a:p>
+                  </a:txBody>
+                  <a:tcPr/>
+                </a:tc>
+              </a:tr>
+              <a:tr h="2103120">
+                <a:tc>
+                  <a:txBody>
+                    <a:bodyPr/>
+                    <a:lstStyle/>
+                    <a:p>
+                      <a:pPr>
+                        <a:defRPr sz="1000"/>
+                      </a:pPr>
+                      <a:r>
+                        <a:t>Cholesterin</a:t>
+                      </a:r>
+                    </a:p>
+                  </a:txBody>
+                  <a:tcPr>
+                    <a:solidFill>
+                      <a:srgbClr val="FFFFFF"/>
+                    </a:solidFill>
+                  </a:tcPr>
+                </a:tc>
+                <a:tc>
+                  <a:txBody>
+                    <a:bodyPr/>
+                    <a:lstStyle/>
+                    <a:p>
+                      <a:pPr>
+                        <a:defRPr sz="1000"/>
+                      </a:pPr>
+                      <a:r>
+                        <a:t>197.0</a:t>
+                      </a:r>
+                    </a:p>
+                  </a:txBody>
+                  <a:tcPr>
+                    <a:solidFill>
+                      <a:srgbClr val="FFFFFF"/>
+                    </a:solidFill>
+                  </a:tcPr>
+                </a:tc>
+                <a:tc>
+                  <a:txBody>
+                    <a:bodyPr/>
+                    <a:lstStyle/>
+                    <a:p>
+                      <a:pPr>
+                        <a:defRPr sz="1000"/>
+                      </a:pPr>
+                      <a:r>
+                        <a:t>mg/dl</a:t>
+                      </a:r>
+                    </a:p>
+                  </a:txBody>
+                  <a:tcPr>
+                    <a:solidFill>
+                      <a:srgbClr val="FFFFFF"/>
+                    </a:solidFill>
+                  </a:tcPr>
+                </a:tc>
+                <a:tc>
+                  <a:txBody>
+                    <a:bodyPr/>
+                    <a:lstStyle/>
+                    <a:p>
+                      <a:pPr>
+                        <a:defRPr sz="1000"/>
+                      </a:pPr>
+                      <a:r>
+                        <a:t>&lt; 200</a:t>
+                      </a:r>
+                    </a:p>
+                  </a:txBody>
+                  <a:tcPr>
+                    <a:solidFill>
+                      <a:srgbClr val="FFFFFF"/>
+                    </a:solidFill>
+                  </a:tcPr>
+                </a:tc>
+              </a:tr>
+            </a:tbl>
+          </a:graphicData>
+        </a:graphic>
+      </p:graphicFrame>
+    </p:spTree>
+  </p:cSld>
+  <p:clrMapOvr>
+    <a:masterClrMapping/>
+  </p:clrMapOvr>
+</p:sld>
+</file>
+
+<file path=ppt/slides/slide5.xml><?xml version="1.0" encoding="utf-8"?>
+<p:sld xmlns:a="http://schemas.openxmlformats.org/drawingml/2006/main" xmlns:p="http://schemas.openxmlformats.org/presentationml/2006/main" xmlns:r="http://schemas.openxmlformats.org/officeDocument/2006/relationships">
+  <p:cSld>
+    <p:bg>
+      <p:bgPr>
+        <a:solidFill>
+          <a:srgbClr val="F7F9FB"/>
+        </a:solidFill>
+        <a:effectLst/>
+      </p:bgPr>
+    </p:bg>
+    <p:spTree>
+      <p:nvGrpSpPr>
+        <p:cNvPr id="1" name=""/>
+        <p:cNvGrpSpPr/>
+        <p:nvPr/>
+      </p:nvGrpSpPr>
+      <p:grpSpPr/>
+      <p:sp>
+        <p:nvSpPr>
+          <p:cNvPr id="2" name="Rectangle 1"/>
+          <p:cNvSpPr/>
+          <p:nvPr/>
+        </p:nvSpPr>
+        <p:spPr>
+          <a:xfrm>
+            <a:off x="0" y="0"/>
+            <a:ext cx="9144000" cy="347472"/>
+          </a:xfrm>
+          <a:prstGeom prst="rect">
+            <a:avLst/>
+          </a:prstGeom>
+          <a:solidFill>
+            <a:srgbClr val="0B3D59"/>
+          </a:solidFill>
+          <a:ln>
+            <a:noFill/>
+          </a:ln>
+        </p:spPr>
+        <p:style>
+          <a:lnRef idx="1">
+            <a:schemeClr val="accent1"/>
+          </a:lnRef>
+          <a:fillRef idx="3">
+            <a:schemeClr val="accent1"/>
+          </a:fillRef>
+          <a:effectRef idx="2">
+            <a:schemeClr val="accent1"/>
+          </a:effectRef>
+          <a:fontRef idx="minor">
+            <a:schemeClr val="lt1"/>
+          </a:fontRef>
+        </p:style>
+        <p:txBody>
+          <a:bodyPr rtlCol="0" anchor="ctr"/>
+          <a:lstStyle/>
+          <a:p>
+            <a:pPr algn="ctr"/>
+          </a:p>
+        </p:txBody>
+      </p:sp>
+      <p:sp>
+        <p:nvSpPr>
+          <p:cNvPr id="3" name="Rectangle 2"/>
+          <p:cNvSpPr/>
+          <p:nvPr/>
+        </p:nvSpPr>
+        <p:spPr>
+          <a:xfrm>
+            <a:off x="0" y="347472"/>
+            <a:ext cx="9144000" cy="64008"/>
+          </a:xfrm>
+          <a:prstGeom prst="rect">
+            <a:avLst/>
+          </a:prstGeom>
+          <a:solidFill>
+            <a:srgbClr val="158C92"/>
+          </a:solidFill>
+          <a:ln>
+            <a:noFill/>
+          </a:ln>
+        </p:spPr>
+        <p:style>
+          <a:lnRef idx="1">
+            <a:schemeClr val="accent1"/>
+          </a:lnRef>
+          <a:fillRef idx="3">
+            <a:schemeClr val="accent1"/>
+          </a:fillRef>
+          <a:effectRef idx="2">
+            <a:schemeClr val="accent1"/>
+          </a:effectRef>
+          <a:fontRef idx="minor">
+            <a:schemeClr val="lt1"/>
+          </a:fontRef>
+        </p:style>
+        <p:txBody>
+          <a:bodyPr rtlCol="0" anchor="ctr"/>
+          <a:lstStyle/>
+          <a:p>
+            <a:pPr algn="ctr"/>
+          </a:p>
+        </p:txBody>
+      </p:sp>
+      <p:sp>
+        <p:nvSpPr>
+          <p:cNvPr id="4" name="TextBox 3"/>
+          <p:cNvSpPr txBox="1"/>
+          <p:nvPr/>
+        </p:nvSpPr>
+        <p:spPr>
+          <a:xfrm>
+            <a:off x="502920" y="502920"/>
+            <a:ext cx="8046720" cy="640080"/>
+          </a:xfrm>
+          <a:prstGeom prst="rect">
+            <a:avLst/>
+          </a:prstGeom>
+          <a:noFill/>
+        </p:spPr>
+        <p:txBody>
+          <a:bodyPr wrap="none">
+            <a:spAutoFit/>
+          </a:bodyPr>
+          <a:lstStyle/>
+          <a:p>
+            <a:r>
+              <a:rPr sz="2600" b="1">
+                <a:solidFill>
+                  <a:srgbClr val="0B3D59"/>
+                </a:solidFill>
+              </a:rPr>
+              <a:t>Abnormal Values</a:t>
+            </a:r>
+          </a:p>
+        </p:txBody>
+      </p:sp>
+      <p:sp>
+        <p:nvSpPr>
+          <p:cNvPr id="5" name="TextBox 4"/>
+          <p:cNvSpPr txBox="1"/>
+          <p:nvPr/>
+        </p:nvSpPr>
+        <p:spPr>
+          <a:xfrm>
+            <a:off x="512064" y="960120"/>
+            <a:ext cx="8229600" cy="320040"/>
+          </a:xfrm>
+          <a:prstGeom prst="rect">
+            <a:avLst/>
+          </a:prstGeom>
+          <a:noFill/>
+        </p:spPr>
+        <p:txBody>
+          <a:bodyPr wrap="none">
+            <a:spAutoFit/>
+          </a:bodyPr>
+          <a:lstStyle/>
+          <a:p>
+            <a:pPr>
+              <a:defRPr sz="1100">
+                <a:solidFill>
+                  <a:srgbClr val="495464"/>
+                </a:solidFill>
+              </a:defRPr>
+            </a:pPr>
+            <a:r>
+              <a:t>Values outside or close to the reference range</a:t>
             </a:r>
           </a:p>
         </p:txBody>
@@ -4003,7 +4978,7 @@
                 <a:gridCol w="2560320"/>
                 <a:gridCol w="1097280"/>
               </a:tblGrid>
-              <a:tr h="467360">
+              <a:tr h="2103120">
                 <a:tc>
                   <a:txBody>
                     <a:bodyPr/>
@@ -4100,217 +5075,12 @@
                   <a:tcPr/>
                 </a:tc>
               </a:tr>
-              <a:tr h="467360">
+              <a:tr h="2103120">
                 <a:tc>
                   <a:txBody>
                     <a:bodyPr/>
                     <a:lstStyle/>
                     <a:p>
-                      <a:pPr>
-                        <a:defRPr sz="1000"/>
-                      </a:pPr>
-                      <a:r>
-                        <a:t>Calcium</a:t>
-                      </a:r>
-                    </a:p>
-                  </a:txBody>
-                  <a:tcPr>
-                    <a:solidFill>
-                      <a:srgbClr val="FFFFFF"/>
-                    </a:solidFill>
-                  </a:tcPr>
-                </a:tc>
-                <a:tc>
-                  <a:txBody>
-                    <a:bodyPr/>
-                    <a:lstStyle/>
-                    <a:p>
-                      <a:pPr>
-                        <a:defRPr sz="1000"/>
-                      </a:pPr>
-                      <a:r>
-                        <a:t>2.36</a:t>
-                      </a:r>
-                    </a:p>
-                  </a:txBody>
-                  <a:tcPr>
-                    <a:solidFill>
-                      <a:srgbClr val="FFFFFF"/>
-                    </a:solidFill>
-                  </a:tcPr>
-                </a:tc>
-                <a:tc>
-                  <a:txBody>
-                    <a:bodyPr/>
-                    <a:lstStyle/>
-                    <a:p>
-                      <a:pPr>
-                        <a:defRPr sz="1000"/>
-                      </a:pPr>
-                      <a:r>
-                        <a:t>mmol/l</a:t>
-                      </a:r>
-                    </a:p>
-                  </a:txBody>
-                  <a:tcPr>
-                    <a:solidFill>
-                      <a:srgbClr val="FFFFFF"/>
-                    </a:solidFill>
-                  </a:tcPr>
-                </a:tc>
-                <a:tc>
-                  <a:txBody>
-                    <a:bodyPr/>
-                    <a:lstStyle/>
-                    <a:p>
-                      <a:pPr>
-                        <a:defRPr sz="1000"/>
-                      </a:pPr>
-                      <a:r>
-                        <a:t>2.05 - 2.55</a:t>
-                      </a:r>
-                    </a:p>
-                  </a:txBody>
-                  <a:tcPr>
-                    <a:solidFill>
-                      <a:srgbClr val="FFFFFF"/>
-                    </a:solidFill>
-                  </a:tcPr>
-                </a:tc>
-                <a:tc>
-                  <a:txBody>
-                    <a:bodyPr/>
-                    <a:lstStyle/>
-                    <a:p>
-                      <a:pPr>
-                        <a:defRPr>
-                          <a:solidFill>
-                            <a:srgbClr val="FFFFFF"/>
-                          </a:solidFill>
-                        </a:defRPr>
-                      </a:pPr>
-                      <a:r>
-                        <a:t>borderline</a:t>
-                      </a:r>
-                    </a:p>
-                  </a:txBody>
-                  <a:tcPr>
-                    <a:solidFill>
-                      <a:srgbClr val="F9A825"/>
-                    </a:solidFill>
-                  </a:tcPr>
-                </a:tc>
-              </a:tr>
-              <a:tr h="467360">
-                <a:tc>
-                  <a:txBody>
-                    <a:bodyPr/>
-                    <a:lstStyle/>
-                    <a:p>
-                      <a:pPr>
-                        <a:defRPr sz="1000"/>
-                      </a:pPr>
-                      <a:r>
-                        <a:t>Kalium</a:t>
-                      </a:r>
-                    </a:p>
-                  </a:txBody>
-                  <a:tcPr>
-                    <a:solidFill>
-                      <a:srgbClr val="FFFFFF"/>
-                    </a:solidFill>
-                  </a:tcPr>
-                </a:tc>
-                <a:tc>
-                  <a:txBody>
-                    <a:bodyPr/>
-                    <a:lstStyle/>
-                    <a:p>
-                      <a:pPr>
-                        <a:defRPr sz="1000"/>
-                      </a:pPr>
-                      <a:r>
-                        <a:t>4.7</a:t>
-                      </a:r>
-                    </a:p>
-                  </a:txBody>
-                  <a:tcPr>
-                    <a:solidFill>
-                      <a:srgbClr val="FFFFFF"/>
-                    </a:solidFill>
-                  </a:tcPr>
-                </a:tc>
-                <a:tc>
-                  <a:txBody>
-                    <a:bodyPr/>
-                    <a:lstStyle/>
-                    <a:p>
-                      <a:pPr>
-                        <a:defRPr sz="1000"/>
-                      </a:pPr>
-                      <a:r>
-                        <a:t>mmol/l</a:t>
-                      </a:r>
-                    </a:p>
-                  </a:txBody>
-                  <a:tcPr>
-                    <a:solidFill>
-                      <a:srgbClr val="FFFFFF"/>
-                    </a:solidFill>
-                  </a:tcPr>
-                </a:tc>
-                <a:tc>
-                  <a:txBody>
-                    <a:bodyPr/>
-                    <a:lstStyle/>
-                    <a:p>
-                      <a:pPr>
-                        <a:defRPr sz="1000"/>
-                      </a:pPr>
-                      <a:r>
-                        <a:t>3.5 - 5.1</a:t>
-                      </a:r>
-                    </a:p>
-                  </a:txBody>
-                  <a:tcPr>
-                    <a:solidFill>
-                      <a:srgbClr val="FFFFFF"/>
-                    </a:solidFill>
-                  </a:tcPr>
-                </a:tc>
-                <a:tc>
-                  <a:txBody>
-                    <a:bodyPr/>
-                    <a:lstStyle/>
-                    <a:p>
-                      <a:pPr>
-                        <a:defRPr>
-                          <a:solidFill>
-                            <a:srgbClr val="FFFFFF"/>
-                          </a:solidFill>
-                        </a:defRPr>
-                      </a:pPr>
-                      <a:r>
-                        <a:t>borderline</a:t>
-                      </a:r>
-                    </a:p>
-                  </a:txBody>
-                  <a:tcPr>
-                    <a:solidFill>
-                      <a:srgbClr val="F9A825"/>
-                    </a:solidFill>
-                  </a:tcPr>
-                </a:tc>
-              </a:tr>
-              <a:tr h="467360">
-                <a:tc>
-                  <a:txBody>
-                    <a:bodyPr/>
-                    <a:lstStyle/>
-                    <a:p>
-                      <a:pPr>
-                        <a:defRPr sz="1000"/>
-                      </a:pPr>
                       <a:r>
                         <a:t>Cholesterin</a:t>
                       </a:r>
@@ -4327,9 +5097,6 @@
                     <a:bodyPr/>
                     <a:lstStyle/>
                     <a:p>
-                      <a:pPr>
-                        <a:defRPr sz="1000"/>
-                      </a:pPr>
                       <a:r>
                         <a:t>197.0</a:t>
                       </a:r>
@@ -4346,9 +5113,6 @@
                     <a:bodyPr/>
                     <a:lstStyle/>
                     <a:p>
-                      <a:pPr>
-                        <a:defRPr sz="1000"/>
-                      </a:pPr>
                       <a:r>
                         <a:t>mg/dl</a:t>
                       </a:r>
@@ -4365,1000 +5129,8 @@
                     <a:bodyPr/>
                     <a:lstStyle/>
                     <a:p>
-                      <a:pPr>
-                        <a:defRPr sz="1000"/>
-                      </a:pPr>
                       <a:r>
                         <a:t>&lt; 200</a:t>
-                      </a:r>
-                    </a:p>
-                  </a:txBody>
-                  <a:tcPr>
-                    <a:solidFill>
-                      <a:srgbClr val="FFFFFF"/>
-                    </a:solidFill>
-                  </a:tcPr>
-                </a:tc>
-                <a:tc>
-                  <a:txBody>
-                    <a:bodyPr/>
-                    <a:lstStyle/>
-                    <a:p>
-                      <a:pPr>
-                        <a:defRPr>
-                          <a:solidFill>
-                            <a:srgbClr val="FFFFFF"/>
-                          </a:solidFill>
-                        </a:defRPr>
-                      </a:pPr>
-                      <a:r>
-                        <a:t>normal</a:t>
-                      </a:r>
-                    </a:p>
-                  </a:txBody>
-                  <a:tcPr>
-                    <a:solidFill>
-                      <a:srgbClr val="2E7D32"/>
-                    </a:solidFill>
-                  </a:tcPr>
-                </a:tc>
-              </a:tr>
-              <a:tr h="467360">
-                <a:tc>
-                  <a:txBody>
-                    <a:bodyPr/>
-                    <a:lstStyle/>
-                    <a:p>
-                      <a:pPr>
-                        <a:defRPr sz="1000"/>
-                      </a:pPr>
-                      <a:r>
-                        <a:t>GPT / ALAT</a:t>
-                      </a:r>
-                    </a:p>
-                  </a:txBody>
-                  <a:tcPr>
-                    <a:solidFill>
-                      <a:srgbClr val="FFFFFF"/>
-                    </a:solidFill>
-                  </a:tcPr>
-                </a:tc>
-                <a:tc>
-                  <a:txBody>
-                    <a:bodyPr/>
-                    <a:lstStyle/>
-                    <a:p>
-                      <a:pPr>
-                        <a:defRPr sz="1000"/>
-                      </a:pPr>
-                      <a:r>
-                        <a:t>21.0</a:t>
-                      </a:r>
-                    </a:p>
-                  </a:txBody>
-                  <a:tcPr>
-                    <a:solidFill>
-                      <a:srgbClr val="FFFFFF"/>
-                    </a:solidFill>
-                  </a:tcPr>
-                </a:tc>
-                <a:tc>
-                  <a:txBody>
-                    <a:bodyPr/>
-                    <a:lstStyle/>
-                    <a:p>
-                      <a:pPr>
-                        <a:defRPr sz="1000"/>
-                      </a:pPr>
-                      <a:r>
-                        <a:t>u/l</a:t>
-                      </a:r>
-                    </a:p>
-                  </a:txBody>
-                  <a:tcPr>
-                    <a:solidFill>
-                      <a:srgbClr val="FFFFFF"/>
-                    </a:solidFill>
-                  </a:tcPr>
-                </a:tc>
-                <a:tc>
-                  <a:txBody>
-                    <a:bodyPr/>
-                    <a:lstStyle/>
-                    <a:p>
-                      <a:pPr>
-                        <a:defRPr sz="1000"/>
-                      </a:pPr>
-                      <a:r>
-                        <a:t>&lt; 50</a:t>
-                      </a:r>
-                    </a:p>
-                  </a:txBody>
-                  <a:tcPr>
-                    <a:solidFill>
-                      <a:srgbClr val="FFFFFF"/>
-                    </a:solidFill>
-                  </a:tcPr>
-                </a:tc>
-                <a:tc>
-                  <a:txBody>
-                    <a:bodyPr/>
-                    <a:lstStyle/>
-                    <a:p>
-                      <a:pPr>
-                        <a:defRPr>
-                          <a:solidFill>
-                            <a:srgbClr val="FFFFFF"/>
-                          </a:solidFill>
-                        </a:defRPr>
-                      </a:pPr>
-                      <a:r>
-                        <a:t>normal</a:t>
-                      </a:r>
-                    </a:p>
-                  </a:txBody>
-                  <a:tcPr>
-                    <a:solidFill>
-                      <a:srgbClr val="2E7D32"/>
-                    </a:solidFill>
-                  </a:tcPr>
-                </a:tc>
-              </a:tr>
-              <a:tr h="467360">
-                <a:tc>
-                  <a:txBody>
-                    <a:bodyPr/>
-                    <a:lstStyle/>
-                    <a:p>
-                      <a:pPr>
-                        <a:defRPr sz="1000"/>
-                      </a:pPr>
-                      <a:r>
-                        <a:t>Gamma-Gt</a:t>
-                      </a:r>
-                    </a:p>
-                  </a:txBody>
-                  <a:tcPr>
-                    <a:solidFill>
-                      <a:srgbClr val="FFFFFF"/>
-                    </a:solidFill>
-                  </a:tcPr>
-                </a:tc>
-                <a:tc>
-                  <a:txBody>
-                    <a:bodyPr/>
-                    <a:lstStyle/>
-                    <a:p>
-                      <a:pPr>
-                        <a:defRPr sz="1000"/>
-                      </a:pPr>
-                      <a:r>
-                        <a:t>54.0</a:t>
-                      </a:r>
-                    </a:p>
-                  </a:txBody>
-                  <a:tcPr>
-                    <a:solidFill>
-                      <a:srgbClr val="FFFFFF"/>
-                    </a:solidFill>
-                  </a:tcPr>
-                </a:tc>
-                <a:tc>
-                  <a:txBody>
-                    <a:bodyPr/>
-                    <a:lstStyle/>
-                    <a:p>
-                      <a:pPr>
-                        <a:defRPr sz="1000"/>
-                      </a:pPr>
-                      <a:r>
-                        <a:t>u/l</a:t>
-                      </a:r>
-                    </a:p>
-                  </a:txBody>
-                  <a:tcPr>
-                    <a:solidFill>
-                      <a:srgbClr val="FFFFFF"/>
-                    </a:solidFill>
-                  </a:tcPr>
-                </a:tc>
-                <a:tc>
-                  <a:txBody>
-                    <a:bodyPr/>
-                    <a:lstStyle/>
-                    <a:p>
-                      <a:pPr>
-                        <a:defRPr sz="1000"/>
-                      </a:pPr>
-                      <a:r>
-                        <a:t>&lt; 60</a:t>
-                      </a:r>
-                    </a:p>
-                  </a:txBody>
-                  <a:tcPr>
-                    <a:solidFill>
-                      <a:srgbClr val="FFFFFF"/>
-                    </a:solidFill>
-                  </a:tcPr>
-                </a:tc>
-                <a:tc>
-                  <a:txBody>
-                    <a:bodyPr/>
-                    <a:lstStyle/>
-                    <a:p>
-                      <a:pPr>
-                        <a:defRPr>
-                          <a:solidFill>
-                            <a:srgbClr val="FFFFFF"/>
-                          </a:solidFill>
-                        </a:defRPr>
-                      </a:pPr>
-                      <a:r>
-                        <a:t>normal</a:t>
-                      </a:r>
-                    </a:p>
-                  </a:txBody>
-                  <a:tcPr>
-                    <a:solidFill>
-                      <a:srgbClr val="2E7D32"/>
-                    </a:solidFill>
-                  </a:tcPr>
-                </a:tc>
-              </a:tr>
-              <a:tr h="467360">
-                <a:tc>
-                  <a:txBody>
-                    <a:bodyPr/>
-                    <a:lstStyle/>
-                    <a:p>
-                      <a:pPr>
-                        <a:defRPr sz="1000"/>
-                      </a:pPr>
-                      <a:r>
-                        <a:t>HDL-Cholesterin</a:t>
-                      </a:r>
-                    </a:p>
-                  </a:txBody>
-                  <a:tcPr>
-                    <a:solidFill>
-                      <a:srgbClr val="FFFFFF"/>
-                    </a:solidFill>
-                  </a:tcPr>
-                </a:tc>
-                <a:tc>
-                  <a:txBody>
-                    <a:bodyPr/>
-                    <a:lstStyle/>
-                    <a:p>
-                      <a:pPr>
-                        <a:defRPr sz="1000"/>
-                      </a:pPr>
-                      <a:r>
-                        <a:t>48.0</a:t>
-                      </a:r>
-                    </a:p>
-                  </a:txBody>
-                  <a:tcPr>
-                    <a:solidFill>
-                      <a:srgbClr val="FFFFFF"/>
-                    </a:solidFill>
-                  </a:tcPr>
-                </a:tc>
-                <a:tc>
-                  <a:txBody>
-                    <a:bodyPr/>
-                    <a:lstStyle/>
-                    <a:p>
-                      <a:pPr>
-                        <a:defRPr sz="1000"/>
-                      </a:pPr>
-                      <a:r>
-                        <a:t>mg/dl</a:t>
-                      </a:r>
-                    </a:p>
-                  </a:txBody>
-                  <a:tcPr>
-                    <a:solidFill>
-                      <a:srgbClr val="FFFFFF"/>
-                    </a:solidFill>
-                  </a:tcPr>
-                </a:tc>
-                <a:tc>
-                  <a:txBody>
-                    <a:bodyPr/>
-                    <a:lstStyle/>
-                    <a:p>
-                      <a:pPr>
-                        <a:defRPr sz="1000"/>
-                      </a:pPr>
-                      <a:r>
-                        <a:t>&gt; 40</a:t>
-                      </a:r>
-                    </a:p>
-                  </a:txBody>
-                  <a:tcPr>
-                    <a:solidFill>
-                      <a:srgbClr val="FFFFFF"/>
-                    </a:solidFill>
-                  </a:tcPr>
-                </a:tc>
-                <a:tc>
-                  <a:txBody>
-                    <a:bodyPr/>
-                    <a:lstStyle/>
-                    <a:p>
-                      <a:pPr>
-                        <a:defRPr>
-                          <a:solidFill>
-                            <a:srgbClr val="FFFFFF"/>
-                          </a:solidFill>
-                        </a:defRPr>
-                      </a:pPr>
-                      <a:r>
-                        <a:t>normal</a:t>
-                      </a:r>
-                    </a:p>
-                  </a:txBody>
-                  <a:tcPr>
-                    <a:solidFill>
-                      <a:srgbClr val="2E7D32"/>
-                    </a:solidFill>
-                  </a:tcPr>
-                </a:tc>
-              </a:tr>
-              <a:tr h="467360">
-                <a:tc>
-                  <a:txBody>
-                    <a:bodyPr/>
-                    <a:lstStyle/>
-                    <a:p>
-                      <a:pPr>
-                        <a:defRPr sz="1000"/>
-                      </a:pPr>
-                      <a:r>
-                        <a:t>Kreatinin</a:t>
-                      </a:r>
-                    </a:p>
-                  </a:txBody>
-                  <a:tcPr>
-                    <a:solidFill>
-                      <a:srgbClr val="FFFFFF"/>
-                    </a:solidFill>
-                  </a:tcPr>
-                </a:tc>
-                <a:tc>
-                  <a:txBody>
-                    <a:bodyPr/>
-                    <a:lstStyle/>
-                    <a:p>
-                      <a:pPr>
-                        <a:defRPr sz="1000"/>
-                      </a:pPr>
-                      <a:r>
-                        <a:t>0.95</a:t>
-                      </a:r>
-                    </a:p>
-                  </a:txBody>
-                  <a:tcPr>
-                    <a:solidFill>
-                      <a:srgbClr val="FFFFFF"/>
-                    </a:solidFill>
-                  </a:tcPr>
-                </a:tc>
-                <a:tc>
-                  <a:txBody>
-                    <a:bodyPr/>
-                    <a:lstStyle/>
-                    <a:p>
-                      <a:pPr>
-                        <a:defRPr sz="1000"/>
-                      </a:pPr>
-                      <a:r>
-                        <a:t>mg/dl</a:t>
-                      </a:r>
-                    </a:p>
-                  </a:txBody>
-                  <a:tcPr>
-                    <a:solidFill>
-                      <a:srgbClr val="FFFFFF"/>
-                    </a:solidFill>
-                  </a:tcPr>
-                </a:tc>
-                <a:tc>
-                  <a:txBody>
-                    <a:bodyPr/>
-                    <a:lstStyle/>
-                    <a:p>
-                      <a:pPr>
-                        <a:defRPr sz="1000"/>
-                      </a:pPr>
-                      <a:r>
-                        <a:t>0.84 - 1.25</a:t>
-                      </a:r>
-                    </a:p>
-                  </a:txBody>
-                  <a:tcPr>
-                    <a:solidFill>
-                      <a:srgbClr val="FFFFFF"/>
-                    </a:solidFill>
-                  </a:tcPr>
-                </a:tc>
-                <a:tc>
-                  <a:txBody>
-                    <a:bodyPr/>
-                    <a:lstStyle/>
-                    <a:p>
-                      <a:pPr>
-                        <a:defRPr>
-                          <a:solidFill>
-                            <a:srgbClr val="FFFFFF"/>
-                          </a:solidFill>
-                        </a:defRPr>
-                      </a:pPr>
-                      <a:r>
-                        <a:t>normal</a:t>
-                      </a:r>
-                    </a:p>
-                  </a:txBody>
-                  <a:tcPr>
-                    <a:solidFill>
-                      <a:srgbClr val="2E7D32"/>
-                    </a:solidFill>
-                  </a:tcPr>
-                </a:tc>
-              </a:tr>
-              <a:tr h="467360">
-                <a:tc>
-                  <a:txBody>
-                    <a:bodyPr/>
-                    <a:lstStyle/>
-                    <a:p>
-                      <a:pPr>
-                        <a:defRPr sz="1000"/>
-                      </a:pPr>
-                      <a:r>
-                        <a:t>Triglyceride</a:t>
-                      </a:r>
-                    </a:p>
-                  </a:txBody>
-                  <a:tcPr>
-                    <a:solidFill>
-                      <a:srgbClr val="FFFFFF"/>
-                    </a:solidFill>
-                  </a:tcPr>
-                </a:tc>
-                <a:tc>
-                  <a:txBody>
-                    <a:bodyPr/>
-                    <a:lstStyle/>
-                    <a:p>
-                      <a:pPr>
-                        <a:defRPr sz="1000"/>
-                      </a:pPr>
-                      <a:r>
-                        <a:t>128.0</a:t>
-                      </a:r>
-                    </a:p>
-                  </a:txBody>
-                  <a:tcPr>
-                    <a:solidFill>
-                      <a:srgbClr val="FFFFFF"/>
-                    </a:solidFill>
-                  </a:tcPr>
-                </a:tc>
-                <a:tc>
-                  <a:txBody>
-                    <a:bodyPr/>
-                    <a:lstStyle/>
-                    <a:p>
-                      <a:pPr>
-                        <a:defRPr sz="1000"/>
-                      </a:pPr>
-                      <a:r>
-                        <a:t>mg/dl</a:t>
-                      </a:r>
-                    </a:p>
-                  </a:txBody>
-                  <a:tcPr>
-                    <a:solidFill>
-                      <a:srgbClr val="FFFFFF"/>
-                    </a:solidFill>
-                  </a:tcPr>
-                </a:tc>
-                <a:tc>
-                  <a:txBody>
-                    <a:bodyPr/>
-                    <a:lstStyle/>
-                    <a:p>
-                      <a:pPr>
-                        <a:defRPr sz="1000"/>
-                      </a:pPr>
-                      <a:r>
-                        <a:t>&lt; 150</a:t>
-                      </a:r>
-                    </a:p>
-                  </a:txBody>
-                  <a:tcPr>
-                    <a:solidFill>
-                      <a:srgbClr val="FFFFFF"/>
-                    </a:solidFill>
-                  </a:tcPr>
-                </a:tc>
-                <a:tc>
-                  <a:txBody>
-                    <a:bodyPr/>
-                    <a:lstStyle/>
-                    <a:p>
-                      <a:pPr>
-                        <a:defRPr>
-                          <a:solidFill>
-                            <a:srgbClr val="FFFFFF"/>
-                          </a:solidFill>
-                        </a:defRPr>
-                      </a:pPr>
-                      <a:r>
-                        <a:t>normal</a:t>
-                      </a:r>
-                    </a:p>
-                  </a:txBody>
-                  <a:tcPr>
-                    <a:solidFill>
-                      <a:srgbClr val="2E7D32"/>
-                    </a:solidFill>
-                  </a:tcPr>
-                </a:tc>
-              </a:tr>
-            </a:tbl>
-          </a:graphicData>
-        </a:graphic>
-      </p:graphicFrame>
-    </p:spTree>
-  </p:cSld>
-  <p:clrMapOvr>
-    <a:masterClrMapping/>
-  </p:clrMapOvr>
-</p:sld>
-</file>
-
-<file path=ppt/slides/slide4.xml><?xml version="1.0" encoding="utf-8"?>
-<p:sld xmlns:a="http://schemas.openxmlformats.org/drawingml/2006/main" xmlns:p="http://schemas.openxmlformats.org/presentationml/2006/main" xmlns:r="http://schemas.openxmlformats.org/officeDocument/2006/relationships">
-  <p:cSld>
-    <p:bg>
-      <p:bgPr>
-        <a:solidFill>
-          <a:srgbClr val="F7F9FB"/>
-        </a:solidFill>
-        <a:effectLst/>
-      </p:bgPr>
-    </p:bg>
-    <p:spTree>
-      <p:nvGrpSpPr>
-        <p:cNvPr id="1" name=""/>
-        <p:cNvGrpSpPr/>
-        <p:nvPr/>
-      </p:nvGrpSpPr>
-      <p:grpSpPr/>
-      <p:sp>
-        <p:nvSpPr>
-          <p:cNvPr id="2" name="Rectangle 1"/>
-          <p:cNvSpPr/>
-          <p:nvPr/>
-        </p:nvSpPr>
-        <p:spPr>
-          <a:xfrm>
-            <a:off x="0" y="0"/>
-            <a:ext cx="9144000" cy="347472"/>
-          </a:xfrm>
-          <a:prstGeom prst="rect">
-            <a:avLst/>
-          </a:prstGeom>
-          <a:solidFill>
-            <a:srgbClr val="0B3D59"/>
-          </a:solidFill>
-          <a:ln>
-            <a:noFill/>
-          </a:ln>
-        </p:spPr>
-        <p:style>
-          <a:lnRef idx="1">
-            <a:schemeClr val="accent1"/>
-          </a:lnRef>
-          <a:fillRef idx="3">
-            <a:schemeClr val="accent1"/>
-          </a:fillRef>
-          <a:effectRef idx="2">
-            <a:schemeClr val="accent1"/>
-          </a:effectRef>
-          <a:fontRef idx="minor">
-            <a:schemeClr val="lt1"/>
-          </a:fontRef>
-        </p:style>
-        <p:txBody>
-          <a:bodyPr rtlCol="0" anchor="ctr"/>
-          <a:lstStyle/>
-          <a:p>
-            <a:pPr algn="ctr"/>
-          </a:p>
-        </p:txBody>
-      </p:sp>
-      <p:sp>
-        <p:nvSpPr>
-          <p:cNvPr id="3" name="Rectangle 2"/>
-          <p:cNvSpPr/>
-          <p:nvPr/>
-        </p:nvSpPr>
-        <p:spPr>
-          <a:xfrm>
-            <a:off x="0" y="347472"/>
-            <a:ext cx="9144000" cy="64008"/>
-          </a:xfrm>
-          <a:prstGeom prst="rect">
-            <a:avLst/>
-          </a:prstGeom>
-          <a:solidFill>
-            <a:srgbClr val="158C92"/>
-          </a:solidFill>
-          <a:ln>
-            <a:noFill/>
-          </a:ln>
-        </p:spPr>
-        <p:style>
-          <a:lnRef idx="1">
-            <a:schemeClr val="accent1"/>
-          </a:lnRef>
-          <a:fillRef idx="3">
-            <a:schemeClr val="accent1"/>
-          </a:fillRef>
-          <a:effectRef idx="2">
-            <a:schemeClr val="accent1"/>
-          </a:effectRef>
-          <a:fontRef idx="minor">
-            <a:schemeClr val="lt1"/>
-          </a:fontRef>
-        </p:style>
-        <p:txBody>
-          <a:bodyPr rtlCol="0" anchor="ctr"/>
-          <a:lstStyle/>
-          <a:p>
-            <a:pPr algn="ctr"/>
-          </a:p>
-        </p:txBody>
-      </p:sp>
-      <p:sp>
-        <p:nvSpPr>
-          <p:cNvPr id="4" name="TextBox 3"/>
-          <p:cNvSpPr txBox="1"/>
-          <p:nvPr/>
-        </p:nvSpPr>
-        <p:spPr>
-          <a:xfrm>
-            <a:off x="502920" y="502920"/>
-            <a:ext cx="8046720" cy="640080"/>
-          </a:xfrm>
-          <a:prstGeom prst="rect">
-            <a:avLst/>
-          </a:prstGeom>
-          <a:noFill/>
-        </p:spPr>
-        <p:txBody>
-          <a:bodyPr wrap="none">
-            <a:spAutoFit/>
-          </a:bodyPr>
-          <a:lstStyle/>
-          <a:p>
-            <a:r>
-              <a:rPr sz="2600" b="1">
-                <a:solidFill>
-                  <a:srgbClr val="0B3D59"/>
-                </a:solidFill>
-              </a:rPr>
-              <a:t>Alert Review</a:t>
-            </a:r>
-          </a:p>
-        </p:txBody>
-      </p:sp>
-      <p:sp>
-        <p:nvSpPr>
-          <p:cNvPr id="5" name="TextBox 4"/>
-          <p:cNvSpPr txBox="1"/>
-          <p:nvPr/>
-        </p:nvSpPr>
-        <p:spPr>
-          <a:xfrm>
-            <a:off x="512064" y="960120"/>
-            <a:ext cx="8229600" cy="320040"/>
-          </a:xfrm>
-          <a:prstGeom prst="rect">
-            <a:avLst/>
-          </a:prstGeom>
-          <a:noFill/>
-        </p:spPr>
-        <p:txBody>
-          <a:bodyPr wrap="none">
-            <a:spAutoFit/>
-          </a:bodyPr>
-          <a:lstStyle/>
-          <a:p>
-            <a:pPr>
-              <a:defRPr sz="1100">
-                <a:solidFill>
-                  <a:srgbClr val="495464"/>
-                </a:solidFill>
-              </a:defRPr>
-            </a:pPr>
-            <a:r>
-              <a:t>Values outside or close to the reference range</a:t>
-            </a:r>
-          </a:p>
-        </p:txBody>
-      </p:sp>
-      <p:graphicFrame>
-        <p:nvGraphicFramePr>
-          <p:cNvPr id="6" name="Table 5"/>
-          <p:cNvGraphicFramePr>
-            <a:graphicFrameLocks noGrp="1"/>
-          </p:cNvGraphicFramePr>
-          <p:nvPr/>
-        </p:nvGraphicFramePr>
-        <p:xfrm>
-          <a:off x="365760" y="1417320"/>
-          <a:ext cx="7863840" cy="4206240"/>
-        </p:xfrm>
-        <a:graphic>
-          <a:graphicData uri="http://schemas.openxmlformats.org/drawingml/2006/table">
-            <a:tbl>
-              <a:tblPr firstRow="1" bandRow="1">
-                <a:tableStyleId>{5C22544A-7EE6-4342-B048-85BDC9FD1C3A}</a:tableStyleId>
-              </a:tblPr>
-              <a:tblGrid>
-                <a:gridCol w="2286000"/>
-                <a:gridCol w="1005840"/>
-                <a:gridCol w="914400"/>
-                <a:gridCol w="2560320"/>
-                <a:gridCol w="1097280"/>
-              </a:tblGrid>
-              <a:tr h="1402080">
-                <a:tc>
-                  <a:txBody>
-                    <a:bodyPr/>
-                    <a:lstStyle/>
-                    <a:p>
-                      <a:pPr>
-                        <a:defRPr b="1" sz="1200">
-                          <a:solidFill>
-                            <a:srgbClr val="0B3D59"/>
-                          </a:solidFill>
-                        </a:defRPr>
-                      </a:pPr>
-                      <a:r>
-                        <a:t>Marker</a:t>
-                      </a:r>
-                    </a:p>
-                  </a:txBody>
-                  <a:tcPr/>
-                </a:tc>
-                <a:tc>
-                  <a:txBody>
-                    <a:bodyPr/>
-                    <a:lstStyle/>
-                    <a:p>
-                      <a:pPr>
-                        <a:defRPr b="1" sz="1200">
-                          <a:solidFill>
-                            <a:srgbClr val="0B3D59"/>
-                          </a:solidFill>
-                        </a:defRPr>
-                      </a:pPr>
-                      <a:r>
-                        <a:t>Value</a:t>
-                      </a:r>
-                    </a:p>
-                  </a:txBody>
-                  <a:tcPr/>
-                </a:tc>
-                <a:tc>
-                  <a:txBody>
-                    <a:bodyPr/>
-                    <a:lstStyle/>
-                    <a:p>
-                      <a:pPr>
-                        <a:defRPr b="1" sz="1200">
-                          <a:solidFill>
-                            <a:srgbClr val="0B3D59"/>
-                          </a:solidFill>
-                        </a:defRPr>
-                      </a:pPr>
-                      <a:r>
-                        <a:t>Unit</a:t>
-                      </a:r>
-                    </a:p>
-                  </a:txBody>
-                  <a:tcPr/>
-                </a:tc>
-                <a:tc>
-                  <a:txBody>
-                    <a:bodyPr/>
-                    <a:lstStyle/>
-                    <a:p>
-                      <a:pPr>
-                        <a:defRPr b="1" sz="1200">
-                          <a:solidFill>
-                            <a:srgbClr val="0B3D59"/>
-                          </a:solidFill>
-                        </a:defRPr>
-                      </a:pPr>
-                      <a:r>
-                        <a:t>Reference</a:t>
-                      </a:r>
-                    </a:p>
-                  </a:txBody>
-                  <a:tcPr/>
-                </a:tc>
-                <a:tc>
-                  <a:txBody>
-                    <a:bodyPr/>
-                    <a:lstStyle/>
-                    <a:p>
-                      <a:pPr>
-                        <a:defRPr b="1" sz="1200">
-                          <a:solidFill>
-                            <a:srgbClr val="0B3D59"/>
-                          </a:solidFill>
-                        </a:defRPr>
-                      </a:pPr>
-                      <a:r>
-                        <a:t>Status</a:t>
-                      </a:r>
-                    </a:p>
-                  </a:txBody>
-                  <a:tcPr/>
-                </a:tc>
-              </a:tr>
-              <a:tr h="1402080">
-                <a:tc>
-                  <a:txBody>
-                    <a:bodyPr/>
-                    <a:lstStyle/>
-                    <a:p>
-                      <a:r>
-                        <a:t>Calcium</a:t>
-                      </a:r>
-                    </a:p>
-                  </a:txBody>
-                  <a:tcPr>
-                    <a:solidFill>
-                      <a:srgbClr val="FFFFFF"/>
-                    </a:solidFill>
-                  </a:tcPr>
-                </a:tc>
-                <a:tc>
-                  <a:txBody>
-                    <a:bodyPr/>
-                    <a:lstStyle/>
-                    <a:p>
-                      <a:r>
-                        <a:t>2.36</a:t>
-                      </a:r>
-                    </a:p>
-                  </a:txBody>
-                  <a:tcPr>
-                    <a:solidFill>
-                      <a:srgbClr val="FFFFFF"/>
-                    </a:solidFill>
-                  </a:tcPr>
-                </a:tc>
-                <a:tc>
-                  <a:txBody>
-                    <a:bodyPr/>
-                    <a:lstStyle/>
-                    <a:p>
-                      <a:r>
-                        <a:t>mmol/l</a:t>
-                      </a:r>
-                    </a:p>
-                  </a:txBody>
-                  <a:tcPr>
-                    <a:solidFill>
-                      <a:srgbClr val="FFFFFF"/>
-                    </a:solidFill>
-                  </a:tcPr>
-                </a:tc>
-                <a:tc>
-                  <a:txBody>
-                    <a:bodyPr/>
-                    <a:lstStyle/>
-                    <a:p>
-                      <a:r>
-                        <a:t>2.05 - 2.55</a:t>
-                      </a:r>
-                    </a:p>
-                  </a:txBody>
-                  <a:tcPr>
-                    <a:solidFill>
-                      <a:srgbClr val="FFFFFF"/>
-                    </a:solidFill>
-                  </a:tcPr>
-                </a:tc>
-                <a:tc>
-                  <a:txBody>
-                    <a:bodyPr/>
-                    <a:lstStyle/>
-                    <a:p>
-                      <a:pPr>
-                        <a:defRPr b="1">
-                          <a:solidFill>
-                            <a:srgbClr val="FFFFFF"/>
-                          </a:solidFill>
-                        </a:defRPr>
-                      </a:pPr>
-                      <a:r>
-                        <a:t>borderline</a:t>
-                      </a:r>
-                    </a:p>
-                  </a:txBody>
-                  <a:tcPr>
-                    <a:solidFill>
-                      <a:srgbClr val="F9A825"/>
-                    </a:solidFill>
-                  </a:tcPr>
-                </a:tc>
-              </a:tr>
-              <a:tr h="1402080">
-                <a:tc>
-                  <a:txBody>
-                    <a:bodyPr/>
-                    <a:lstStyle/>
-                    <a:p>
-                      <a:r>
-                        <a:t>Kalium</a:t>
-                      </a:r>
-                    </a:p>
-                  </a:txBody>
-                  <a:tcPr>
-                    <a:solidFill>
-                      <a:srgbClr val="FFFFFF"/>
-                    </a:solidFill>
-                  </a:tcPr>
-                </a:tc>
-                <a:tc>
-                  <a:txBody>
-                    <a:bodyPr/>
-                    <a:lstStyle/>
-                    <a:p>
-                      <a:r>
-                        <a:t>4.7</a:t>
-                      </a:r>
-                    </a:p>
-                  </a:txBody>
-                  <a:tcPr>
-                    <a:solidFill>
-                      <a:srgbClr val="FFFFFF"/>
-                    </a:solidFill>
-                  </a:tcPr>
-                </a:tc>
-                <a:tc>
-                  <a:txBody>
-                    <a:bodyPr/>
-                    <a:lstStyle/>
-                    <a:p>
-                      <a:r>
-                        <a:t>mmol/l</a:t>
-                      </a:r>
-                    </a:p>
-                  </a:txBody>
-                  <a:tcPr>
-                    <a:solidFill>
-                      <a:srgbClr val="FFFFFF"/>
-                    </a:solidFill>
-                  </a:tcPr>
-                </a:tc>
-                <a:tc>
-                  <a:txBody>
-                    <a:bodyPr/>
-                    <a:lstStyle/>
-                    <a:p>
-                      <a:r>
-                        <a:t>3.5 - 5.1</a:t>
                       </a:r>
                     </a:p>
                   </a:txBody>
@@ -5404,7 +5176,7 @@
 </p:sld>
 </file>
 
-<file path=ppt/slides/slide5.xml><?xml version="1.0" encoding="utf-8"?>
+<file path=ppt/slides/slide6.xml><?xml version="1.0" encoding="utf-8"?>
 <p:sld xmlns:a="http://schemas.openxmlformats.org/drawingml/2006/main" xmlns:p="http://schemas.openxmlformats.org/presentationml/2006/main" xmlns:r="http://schemas.openxmlformats.org/officeDocument/2006/relationships">
   <p:cSld>
     <p:bg>
@@ -5632,7 +5404,7 @@
 </p:sld>
 </file>
 
-<file path=ppt/slides/slide6.xml><?xml version="1.0" encoding="utf-8"?>
+<file path=ppt/slides/slide7.xml><?xml version="1.0" encoding="utf-8"?>
 <p:sld xmlns:a="http://schemas.openxmlformats.org/drawingml/2006/main" xmlns:p="http://schemas.openxmlformats.org/presentationml/2006/main" xmlns:r="http://schemas.openxmlformats.org/officeDocument/2006/relationships">
   <p:cSld>
     <p:bg>
@@ -5764,7 +5536,7 @@
                   <a:srgbClr val="0B3D59"/>
                 </a:solidFill>
               </a:rPr>
-              <a:t>Summary</a:t>
+              <a:t>Recommendations</a:t>
             </a:r>
           </a:p>
         </p:txBody>
@@ -5799,7 +5571,7 @@
               </a:defRPr>
             </a:pPr>
             <a:r>
-              <a:t>Main findings from the structured OCR output</a:t>
+              <a:t>Data-driven next steps based on notable values</a:t>
             </a:r>
           </a:p>
         </p:txBody>
@@ -5813,7 +5585,7 @@
         <p:spPr>
           <a:xfrm>
             <a:off x="777240" y="1508760"/>
-            <a:ext cx="7680960" cy="4023360"/>
+            <a:ext cx="7863840" cy="4206240"/>
           </a:xfrm>
           <a:prstGeom prst="rect">
             <a:avLst/>
@@ -5827,62 +5599,26 @@
           <a:lstStyle/>
           <a:p>
             <a:pPr>
-              <a:defRPr sz="2000">
+              <a:defRPr sz="1800">
                 <a:solidFill>
                   <a:srgbClr val="495464"/>
                 </a:solidFill>
               </a:defRPr>
             </a:pPr>
             <a:r>
-              <a:t>Total markers evaluated: 8</a:t>
+              <a:t>Review lipid values with your clinician, especially if they remain above target on repeat testing.</a:t>
             </a:r>
           </a:p>
           <a:p>
             <a:pPr>
-              <a:defRPr sz="2000">
+              <a:defRPr sz="1800">
                 <a:solidFill>
                   <a:srgbClr val="495464"/>
                 </a:solidFill>
               </a:defRPr>
             </a:pPr>
             <a:r>
-              <a:t>Normal values: 6</a:t>
-            </a:r>
-          </a:p>
-          <a:p>
-            <a:pPr>
-              <a:defRPr sz="2000">
-                <a:solidFill>
-                  <a:srgbClr val="495464"/>
-                </a:solidFill>
-              </a:defRPr>
-            </a:pPr>
-            <a:r>
-              <a:t>Notable values: 2</a:t>
-            </a:r>
-          </a:p>
-          <a:p>
-            <a:pPr>
-              <a:defRPr sz="2000">
-                <a:solidFill>
-                  <a:srgbClr val="495464"/>
-                </a:solidFill>
-              </a:defRPr>
-            </a:pPr>
-            <a:r>
-              <a:t>Largest deviation: Kalium (4.7 mmol/l)</a:t>
-            </a:r>
-          </a:p>
-          <a:p>
-            <a:pPr>
-              <a:defRPr sz="2000">
-                <a:solidFill>
-                  <a:srgbClr val="495464"/>
-                </a:solidFill>
-              </a:defRPr>
-            </a:pPr>
-            <a:r>
-              <a:t>Use this report together with the original laboratory context for interpretation.</a:t>
+              <a:t>This report is informational and does not replace medical advice.</a:t>
             </a:r>
           </a:p>
         </p:txBody>
